--- a/docs/presentations/第六组选题PPT.pptx
+++ b/docs/presentations/第六组选题PPT.pptx
@@ -3511,7 +3511,29 @@
                 <a:ea typeface="Hiragino Sans GB" panose="020B0300000000000000" charset="-122"/>
                 <a:cs typeface="Hiragino Sans GB" panose="020B0300000000000000" charset="-122"/>
               </a:rPr>
-              <a:t>包含六个方向</a:t>
+              <a:t>包含</a:t>
+            </a:r>
+            <a:r>
+              <a:rPr lang="zh-CN" sz="3300" b="1">
+                <a:solidFill>
+                  <a:srgbClr val="172A2A"/>
+                </a:solidFill>
+                <a:latin typeface="Hiragino Sans GB" panose="020B0300000000000000" charset="-122"/>
+                <a:ea typeface="Hiragino Sans GB" panose="020B0300000000000000" charset="-122"/>
+                <a:cs typeface="Hiragino Sans GB" panose="020B0300000000000000" charset="-122"/>
+              </a:rPr>
+              <a:t>五</a:t>
+            </a:r>
+            <a:r>
+              <a:rPr sz="3300" b="1">
+                <a:solidFill>
+                  <a:srgbClr val="172A2A"/>
+                </a:solidFill>
+                <a:latin typeface="Hiragino Sans GB" panose="020B0300000000000000" charset="-122"/>
+                <a:ea typeface="Hiragino Sans GB" panose="020B0300000000000000" charset="-122"/>
+                <a:cs typeface="Hiragino Sans GB" panose="020B0300000000000000" charset="-122"/>
+              </a:rPr>
+              <a:t>个方向</a:t>
             </a:r>
             <a:endParaRPr lang="zh-CN" sz="3300" b="1">
               <a:solidFill>
@@ -4170,9 +4192,9 @@
                           <a:ea typeface="Hiragino Sans GB" panose="020B0300000000000000" charset="-122"/>
                           <a:cs typeface="Hiragino Sans GB" panose="020B0300000000000000" charset="-122"/>
                         </a:rPr>
-                        <a:t>主线进度漏斗</a:t>
-                      </a:r>
-                      <a:endParaRPr sz="1725" b="0">
+                        <a:t>可解释推荐</a:t>
+                      </a:r>
+                      <a:endParaRPr lang="en-US" sz="1725" b="0">
                         <a:solidFill>
                           <a:srgbClr val="172A2A"/>
                         </a:solidFill>
@@ -4258,17 +4280,28 @@
                     <a:p>
                       <a:pPr algn="l"/>
                       <a:r>
-                        <a:rPr sz="1725" b="0">
-                          <a:solidFill>
-                            <a:srgbClr val="172A2A"/>
-                          </a:solidFill>
-                          <a:latin typeface="Hiragino Sans GB" panose="020B0300000000000000" charset="-122"/>
-                          <a:ea typeface="Hiragino Sans GB" panose="020B0300000000000000" charset="-122"/>
-                          <a:cs typeface="Hiragino Sans GB" panose="020B0300000000000000" charset="-122"/>
-                        </a:rPr>
-                        <a:t>刘宇翔</a:t>
-                      </a:r>
-                      <a:endParaRPr lang="en-US" sz="1725" b="0">
+                        <a:rPr lang="zh-CN" altLang="en-US" sz="1725" b="0">
+                          <a:solidFill>
+                            <a:srgbClr val="172A2A"/>
+                          </a:solidFill>
+                          <a:latin typeface="Hiragino Sans GB" panose="020B0300000000000000" charset="-122"/>
+                          <a:ea typeface="Hiragino Sans GB" panose="020B0300000000000000" charset="-122"/>
+                          <a:cs typeface="Hiragino Sans GB" panose="020B0300000000000000" charset="-122"/>
+                        </a:rPr>
+                        <a:t>朱政</a:t>
+                      </a:r>
+                      <a:r>
+                        <a:rPr lang="zh-CN" altLang="en-US" sz="1725" b="0">
+                          <a:solidFill>
+                            <a:srgbClr val="172A2A"/>
+                          </a:solidFill>
+                          <a:latin typeface="Hiragino Sans GB" panose="020B0300000000000000" charset="-122"/>
+                          <a:ea typeface="Hiragino Sans GB" panose="020B0300000000000000" charset="-122"/>
+                          <a:cs typeface="Hiragino Sans GB" panose="020B0300000000000000" charset="-122"/>
+                        </a:rPr>
+                        <a:t>宇</a:t>
+                      </a:r>
+                      <a:endParaRPr lang="zh-CN" altLang="en-US" sz="1725" b="0">
                         <a:solidFill>
                           <a:srgbClr val="172A2A"/>
                         </a:solidFill>
@@ -4311,7 +4344,7 @@
                           <a:ea typeface="Hiragino Sans GB" panose="020B0300000000000000" charset="-122"/>
                           <a:cs typeface="Hiragino Sans GB" panose="020B0300000000000000" charset="-122"/>
                         </a:rPr>
-                        <a:t>关键主线节点完成率</a:t>
+                        <a:t>相似游戏与推荐理由</a:t>
                       </a:r>
                       <a:endParaRPr sz="1725" b="0">
                         <a:solidFill>
@@ -4350,6 +4383,17 @@
                     <a:p>
                       <a:pPr algn="l"/>
                       <a:r>
+                        <a:rPr lang="zh-CN" sz="1725" b="0">
+                          <a:solidFill>
+                            <a:srgbClr val="172A2A"/>
+                          </a:solidFill>
+                          <a:latin typeface="Hiragino Sans GB" panose="020B0300000000000000" charset="-122"/>
+                          <a:ea typeface="Hiragino Sans GB" panose="020B0300000000000000" charset="-122"/>
+                          <a:cs typeface="Hiragino Sans GB" panose="020B0300000000000000" charset="-122"/>
+                        </a:rPr>
+                        <a:t>实际</a:t>
+                      </a:r>
+                      <a:r>
                         <a:rPr sz="1725" b="0">
                           <a:solidFill>
                             <a:srgbClr val="172A2A"/>
@@ -4358,9 +4402,21 @@
                           <a:ea typeface="Hiragino Sans GB" panose="020B0300000000000000" charset="-122"/>
                           <a:cs typeface="Hiragino Sans GB" panose="020B0300000000000000" charset="-122"/>
                         </a:rPr>
-                        <a:t>可解释推荐</a:t>
-                      </a:r>
-                      <a:endParaRPr lang="en-US" sz="1725" b="0">
+                        <a:t>完成曲线与</a:t>
+                      </a:r>
+                      <a:r>
+                        <a:rPr lang="zh-CN" sz="1725">
+                          <a:solidFill>
+                            <a:srgbClr val="172A2A"/>
+                          </a:solidFill>
+                          <a:latin typeface="Hiragino Sans GB" panose="020B0300000000000000" charset="-122"/>
+                          <a:ea typeface="Hiragino Sans GB" panose="020B0300000000000000" charset="-122"/>
+                          <a:cs typeface="Hiragino Sans GB" panose="020B0300000000000000" charset="-122"/>
+                          <a:sym typeface="+mn-ea"/>
+                        </a:rPr>
+                        <a:t>游戏用户粘性分析</a:t>
+                      </a:r>
+                      <a:endParaRPr lang="zh-CN" sz="1725" b="0">
                         <a:solidFill>
                           <a:srgbClr val="172A2A"/>
                         </a:solidFill>
@@ -4401,7 +4457,7 @@
                     <a:p>
                       <a:pPr algn="l"/>
                       <a:r>
-                        <a:rPr sz="1725" b="0">
+                        <a:rPr lang="zh-CN" sz="1725" b="0">
                           <a:solidFill>
                             <a:srgbClr val="172A2A"/>
                           </a:solidFill>
@@ -4411,7 +4467,7 @@
                         </a:rPr>
                         <a:t>主线</a:t>
                       </a:r>
-                      <a:endParaRPr sz="1725" b="0">
+                      <a:endParaRPr lang="zh-CN" sz="1725" b="0">
                         <a:solidFill>
                           <a:srgbClr val="172A2A"/>
                         </a:solidFill>
@@ -4446,17 +4502,39 @@
                     <a:p>
                       <a:pPr algn="l"/>
                       <a:r>
-                        <a:rPr lang="zh-CN" altLang="en-US" sz="1725" b="0">
-                          <a:solidFill>
-                            <a:srgbClr val="172A2A"/>
-                          </a:solidFill>
-                          <a:latin typeface="Hiragino Sans GB" panose="020B0300000000000000" charset="-122"/>
-                          <a:ea typeface="Hiragino Sans GB" panose="020B0300000000000000" charset="-122"/>
-                          <a:cs typeface="Hiragino Sans GB" panose="020B0300000000000000" charset="-122"/>
-                        </a:rPr>
-                        <a:t>全体</a:t>
-                      </a:r>
-                      <a:endParaRPr lang="zh-CN" altLang="en-US" sz="1725" b="0">
+                        <a:rPr sz="1725" b="0">
+                          <a:solidFill>
+                            <a:srgbClr val="172A2A"/>
+                          </a:solidFill>
+                          <a:latin typeface="Hiragino Sans GB" panose="020B0300000000000000" charset="-122"/>
+                          <a:ea typeface="Hiragino Sans GB" panose="020B0300000000000000" charset="-122"/>
+                          <a:cs typeface="Hiragino Sans GB" panose="020B0300000000000000" charset="-122"/>
+                        </a:rPr>
+                        <a:t>王文海</a:t>
+                      </a:r>
+                      <a:r>
+                        <a:rPr lang="zh-CN" sz="1725" b="0">
+                          <a:solidFill>
+                            <a:srgbClr val="172A2A"/>
+                          </a:solidFill>
+                          <a:latin typeface="Hiragino Sans GB" panose="020B0300000000000000" charset="-122"/>
+                          <a:ea typeface="Hiragino Sans GB" panose="020B0300000000000000" charset="-122"/>
+                          <a:cs typeface="Hiragino Sans GB" panose="020B0300000000000000" charset="-122"/>
+                        </a:rPr>
+                        <a:t>、刘宇</a:t>
+                      </a:r>
+                      <a:r>
+                        <a:rPr lang="zh-CN" sz="1725" b="0">
+                          <a:solidFill>
+                            <a:srgbClr val="172A2A"/>
+                          </a:solidFill>
+                          <a:latin typeface="Hiragino Sans GB" panose="020B0300000000000000" charset="-122"/>
+                          <a:ea typeface="Hiragino Sans GB" panose="020B0300000000000000" charset="-122"/>
+                          <a:cs typeface="Hiragino Sans GB" panose="020B0300000000000000" charset="-122"/>
+                        </a:rPr>
+                        <a:t>翔</a:t>
+                      </a:r>
+                      <a:endParaRPr lang="zh-CN" sz="1725" b="0">
                         <a:solidFill>
                           <a:srgbClr val="172A2A"/>
                         </a:solidFill>
@@ -4491,95 +4569,16 @@
                     <a:p>
                       <a:pPr algn="l"/>
                       <a:r>
-                        <a:rPr sz="1725" b="0">
-                          <a:solidFill>
-                            <a:srgbClr val="172A2A"/>
-                          </a:solidFill>
-                          <a:latin typeface="Hiragino Sans GB" panose="020B0300000000000000" charset="-122"/>
-                          <a:ea typeface="Hiragino Sans GB" panose="020B0300000000000000" charset="-122"/>
-                          <a:cs typeface="Hiragino Sans GB" panose="020B0300000000000000" charset="-122"/>
-                        </a:rPr>
-                        <a:t>相似游戏与推荐理由</a:t>
-                      </a:r>
-                      <a:endParaRPr sz="1725" b="0">
-                        <a:solidFill>
-                          <a:srgbClr val="172A2A"/>
-                        </a:solidFill>
-                        <a:latin typeface="Hiragino Sans GB" panose="020B0300000000000000" charset="-122"/>
-                        <a:ea typeface="Hiragino Sans GB" panose="020B0300000000000000" charset="-122"/>
-                        <a:cs typeface="Hiragino Sans GB" panose="020B0300000000000000" charset="-122"/>
-                      </a:endParaRPr>
-                    </a:p>
-                  </a:txBody>
-                  <a:tcPr marL="133350" marR="133350" marT="76200" marB="76200" anchor="ctr">
-                    <a:lnR w="6191">
-                      <a:solidFill>
-                        <a:srgbClr val="D8DED7"/>
-                      </a:solidFill>
-                      <a:prstDash val="solid"/>
-                    </a:lnR>
-                    <a:lnB w="6191">
-                      <a:solidFill>
-                        <a:srgbClr val="D8DED7"/>
-                      </a:solidFill>
-                      <a:prstDash val="solid"/>
-                    </a:lnB>
-                    <a:solidFill>
-                      <a:srgbClr val="F4F2EC"/>
-                    </a:solidFill>
-                  </a:tcPr>
-                </a:tc>
-              </a:tr>
-              <a:tr h="576943">
-                <a:tc>
-                  <a:txBody>
-                    <a:bodyPr/>
-                    <a:lstStyle/>
-                    <a:p>
-                      <a:pPr algn="l"/>
-                      <a:r>
-                        <a:rPr lang="zh-CN" sz="1725" b="0">
-                          <a:solidFill>
-                            <a:srgbClr val="172A2A"/>
-                          </a:solidFill>
-                          <a:latin typeface="Hiragino Sans GB" panose="020B0300000000000000" charset="-122"/>
-                          <a:ea typeface="Hiragino Sans GB" panose="020B0300000000000000" charset="-122"/>
-                          <a:cs typeface="Hiragino Sans GB" panose="020B0300000000000000" charset="-122"/>
-                        </a:rPr>
-                        <a:t>实际</a:t>
-                      </a:r>
-                      <a:r>
-                        <a:rPr sz="1725" b="0">
-                          <a:solidFill>
-                            <a:srgbClr val="172A2A"/>
-                          </a:solidFill>
-                          <a:latin typeface="Hiragino Sans GB" panose="020B0300000000000000" charset="-122"/>
-                          <a:ea typeface="Hiragino Sans GB" panose="020B0300000000000000" charset="-122"/>
-                          <a:cs typeface="Hiragino Sans GB" panose="020B0300000000000000" charset="-122"/>
-                        </a:rPr>
-                        <a:t>完成曲线与RAWG</a:t>
-                      </a:r>
-                      <a:r>
-                        <a:rPr lang="zh-CN" sz="1725" b="0">
-                          <a:solidFill>
-                            <a:srgbClr val="172A2A"/>
-                          </a:solidFill>
-                          <a:latin typeface="Hiragino Sans GB" panose="020B0300000000000000" charset="-122"/>
-                          <a:ea typeface="Hiragino Sans GB" panose="020B0300000000000000" charset="-122"/>
-                          <a:cs typeface="Hiragino Sans GB" panose="020B0300000000000000" charset="-122"/>
-                        </a:rPr>
-                        <a:t>论坛数据</a:t>
-                      </a:r>
-                      <a:r>
-                        <a:rPr lang="zh-CN" sz="1725" b="0">
-                          <a:solidFill>
-                            <a:srgbClr val="172A2A"/>
-                          </a:solidFill>
-                          <a:latin typeface="Hiragino Sans GB" panose="020B0300000000000000" charset="-122"/>
-                          <a:ea typeface="Hiragino Sans GB" panose="020B0300000000000000" charset="-122"/>
-                          <a:cs typeface="Hiragino Sans GB" panose="020B0300000000000000" charset="-122"/>
-                        </a:rPr>
-                        <a:t>对比</a:t>
+                        <a:rPr sz="1725">
+                          <a:solidFill>
+                            <a:srgbClr val="172A2A"/>
+                          </a:solidFill>
+                          <a:latin typeface="Hiragino Sans GB" panose="020B0300000000000000" charset="-122"/>
+                          <a:ea typeface="Hiragino Sans GB" panose="020B0300000000000000" charset="-122"/>
+                          <a:cs typeface="Hiragino Sans GB" panose="020B0300000000000000" charset="-122"/>
+                          <a:sym typeface="+mn-ea"/>
+                        </a:rPr>
+                        <a:t>关键主线节点完成率</a:t>
                       </a:r>
                       <a:endParaRPr lang="zh-CN" sz="1725" b="0">
                         <a:solidFill>
@@ -4590,35 +4589,6 @@
                         <a:cs typeface="Hiragino Sans GB" panose="020B0300000000000000" charset="-122"/>
                       </a:endParaRPr>
                     </a:p>
-                  </a:txBody>
-                  <a:tcPr marL="133350" marR="133350" marT="76200" marB="76200" anchor="ctr">
-                    <a:lnL w="6191">
-                      <a:solidFill>
-                        <a:srgbClr val="D8DED7"/>
-                      </a:solidFill>
-                      <a:prstDash val="solid"/>
-                    </a:lnL>
-                    <a:lnR w="6191">
-                      <a:solidFill>
-                        <a:srgbClr val="D8DED7"/>
-                      </a:solidFill>
-                      <a:prstDash val="solid"/>
-                    </a:lnR>
-                    <a:lnB w="6191">
-                      <a:solidFill>
-                        <a:srgbClr val="D8DED7"/>
-                      </a:solidFill>
-                      <a:prstDash val="solid"/>
-                    </a:lnB>
-                    <a:solidFill>
-                      <a:srgbClr val="F4F2EC"/>
-                    </a:solidFill>
-                  </a:tcPr>
-                </a:tc>
-                <a:tc>
-                  <a:txBody>
-                    <a:bodyPr/>
-                    <a:lstStyle/>
                     <a:p>
                       <a:pPr algn="l"/>
                       <a:r>
@@ -4630,99 +4600,20 @@
                           <a:ea typeface="Hiragino Sans GB" panose="020B0300000000000000" charset="-122"/>
                           <a:cs typeface="Hiragino Sans GB" panose="020B0300000000000000" charset="-122"/>
                         </a:rPr>
-                        <a:t>扩展</a:t>
+                        <a:t>、</a:t>
+                      </a:r>
+                      <a:r>
+                        <a:rPr sz="1725" b="0">
+                          <a:solidFill>
+                            <a:srgbClr val="172A2A"/>
+                          </a:solidFill>
+                          <a:latin typeface="Hiragino Sans GB" panose="020B0300000000000000" charset="-122"/>
+                          <a:ea typeface="Hiragino Sans GB" panose="020B0300000000000000" charset="-122"/>
+                          <a:cs typeface="Hiragino Sans GB" panose="020B0300000000000000" charset="-122"/>
+                        </a:rPr>
+                        <a:t>内容分类与跨平台对照</a:t>
                       </a:r>
                       <a:endParaRPr lang="zh-CN" sz="1725" b="0">
-                        <a:solidFill>
-                          <a:srgbClr val="172A2A"/>
-                        </a:solidFill>
-                        <a:latin typeface="Hiragino Sans GB" panose="020B0300000000000000" charset="-122"/>
-                        <a:ea typeface="Hiragino Sans GB" panose="020B0300000000000000" charset="-122"/>
-                        <a:cs typeface="Hiragino Sans GB" panose="020B0300000000000000" charset="-122"/>
-                      </a:endParaRPr>
-                    </a:p>
-                  </a:txBody>
-                  <a:tcPr marL="133350" marR="133350" marT="76200" marB="76200" anchor="ctr">
-                    <a:lnR w="6191">
-                      <a:solidFill>
-                        <a:srgbClr val="D8DED7"/>
-                      </a:solidFill>
-                      <a:prstDash val="solid"/>
-                    </a:lnR>
-                    <a:lnB w="6191">
-                      <a:solidFill>
-                        <a:srgbClr val="D8DED7"/>
-                      </a:solidFill>
-                      <a:prstDash val="solid"/>
-                    </a:lnB>
-                    <a:solidFill>
-                      <a:srgbClr val="F4F2EC"/>
-                    </a:solidFill>
-                  </a:tcPr>
-                </a:tc>
-                <a:tc>
-                  <a:txBody>
-                    <a:bodyPr/>
-                    <a:lstStyle/>
-                    <a:p>
-                      <a:pPr algn="l"/>
-                      <a:r>
-                        <a:rPr sz="1725" b="0">
-                          <a:solidFill>
-                            <a:srgbClr val="172A2A"/>
-                          </a:solidFill>
-                          <a:latin typeface="Hiragino Sans GB" panose="020B0300000000000000" charset="-122"/>
-                          <a:ea typeface="Hiragino Sans GB" panose="020B0300000000000000" charset="-122"/>
-                          <a:cs typeface="Hiragino Sans GB" panose="020B0300000000000000" charset="-122"/>
-                        </a:rPr>
-                        <a:t>王文海</a:t>
-                      </a:r>
-                      <a:endParaRPr lang="en-US" sz="1725" b="0">
-                        <a:solidFill>
-                          <a:srgbClr val="172A2A"/>
-                        </a:solidFill>
-                        <a:latin typeface="Hiragino Sans GB" panose="020B0300000000000000" charset="-122"/>
-                        <a:ea typeface="Hiragino Sans GB" panose="020B0300000000000000" charset="-122"/>
-                        <a:cs typeface="Hiragino Sans GB" panose="020B0300000000000000" charset="-122"/>
-                      </a:endParaRPr>
-                    </a:p>
-                  </a:txBody>
-                  <a:tcPr marL="133350" marR="133350" marT="76200" marB="76200" anchor="ctr">
-                    <a:lnR w="6191">
-                      <a:solidFill>
-                        <a:srgbClr val="D8DED7"/>
-                      </a:solidFill>
-                      <a:prstDash val="solid"/>
-                    </a:lnR>
-                    <a:lnB w="6191">
-                      <a:solidFill>
-                        <a:srgbClr val="D8DED7"/>
-                      </a:solidFill>
-                      <a:prstDash val="solid"/>
-                    </a:lnB>
-                    <a:solidFill>
-                      <a:srgbClr val="F4F2EC"/>
-                    </a:solidFill>
-                  </a:tcPr>
-                </a:tc>
-                <a:tc>
-                  <a:txBody>
-                    <a:bodyPr/>
-                    <a:lstStyle/>
-                    <a:p>
-                      <a:pPr algn="l"/>
-                      <a:r>
-                        <a:rPr sz="1725" b="0">
-                          <a:solidFill>
-                            <a:srgbClr val="172A2A"/>
-                          </a:solidFill>
-                          <a:latin typeface="Hiragino Sans GB" panose="020B0300000000000000" charset="-122"/>
-                          <a:ea typeface="Hiragino Sans GB" panose="020B0300000000000000" charset="-122"/>
-                          <a:cs typeface="Hiragino Sans GB" panose="020B0300000000000000" charset="-122"/>
-                        </a:rPr>
-                        <a:t>内容分类与跨平台对照</a:t>
-                      </a:r>
-                      <a:endParaRPr sz="1725" b="0">
                         <a:solidFill>
                           <a:srgbClr val="172A2A"/>
                         </a:solidFill>
